--- a/classes/parte-7-red-team-y-operaciones-ofensivas/175-persistencia-en-active-directory/clase-175-presentacion.pptx
+++ b/classes/parte-7-red-team-y-operaciones-ofensivas/175-persistencia-en-active-directory/clase-175-presentacion.pptx
@@ -17,6 +17,9 @@
     <p:sldId id="265" r:id="rId16"/>
     <p:sldId id="266" r:id="rId17"/>
     <p:sldId id="267" r:id="rId18"/>
+    <p:sldId id="268" r:id="rId19"/>
+    <p:sldId id="269" r:id="rId20"/>
+    <p:sldId id="270" r:id="rId21"/>
   </p:sldIdLst>
   <p:sldSz cx="9144000" cy="6858000" type="screen4x3"/>
   <p:notesSz cx="6858000" cy="9144000"/>
@@ -3198,7 +3201,7 @@
                   <a:srgbClr val="0B3D2E"/>
                 </a:solidFill>
               </a:rPr>
-              <a:t>⚠️ Errores comunes</a:t>
+              <a:t>✍️ Ejercicios</a:t>
             </a:r>
           </a:p>
         </p:txBody>
@@ -3236,67 +3239,82 @@
                   <a:srgbClr val="22282E"/>
                 </a:solidFill>
               </a:rPr>
-              <a:t>•  La persistencia por ACL se borra — No usaste AdminSDHolder; SDProp la reinyecta si la pones ahí</a:t>
-            </a:r>
-          </a:p>
-          <a:p>
-            <a:pPr>
-              <a:spcAft>
-                <a:spcPts val="600"/>
-              </a:spcAft>
-            </a:pPr>
-            <a:r>
-              <a:rPr sz="1500">
-                <a:solidFill>
-                  <a:srgbClr val="22282E"/>
-                </a:solidFill>
-              </a:rPr>
-              <a:t>•  DCShadow falla — Requiere privilegios altos y condiciones específicas; revisa requisitos</a:t>
-            </a:r>
-          </a:p>
-          <a:p>
-            <a:pPr>
-              <a:spcAft>
-                <a:spcPts val="600"/>
-              </a:spcAft>
-            </a:pPr>
-            <a:r>
-              <a:rPr sz="1500">
-                <a:solidFill>
-                  <a:srgbClr val="22282E"/>
-                </a:solidFill>
-              </a:rPr>
-              <a:t>•  RBCD no impersona — msDS-AllowedToActOnBehalfOfOtherIdentity mal configurado; corrige el descriptor</a:t>
-            </a:r>
-          </a:p>
-          <a:p>
-            <a:pPr>
-              <a:spcAft>
-                <a:spcPts val="600"/>
-              </a:spcAft>
-            </a:pPr>
-            <a:r>
-              <a:rPr sz="1500">
-                <a:solidFill>
-                  <a:srgbClr val="22282E"/>
-                </a:solidFill>
-              </a:rPr>
-              <a:t>•  Erradicación incompleta — Olvidaste resetear krbtgt (x2) o revisar delegaciones; usa el checklist</a:t>
-            </a:r>
-          </a:p>
-          <a:p>
-            <a:pPr>
-              <a:spcAft>
-                <a:spcPts val="600"/>
-              </a:spcAft>
-            </a:pPr>
-            <a:r>
-              <a:rPr sz="1500">
-                <a:solidFill>
-                  <a:srgbClr val="22282E"/>
-                </a:solidFill>
-              </a:rPr>
-              <a:t>•  Persistencia detectada al instante — Cambios de ACL auditados (5136); es telemetría esperable</a:t>
+              <a:t>•  Instala persistencia por ACL DCSync y demuéstrala.</a:t>
+            </a:r>
+          </a:p>
+          <a:p>
+            <a:pPr>
+              <a:spcAft>
+                <a:spcPts val="600"/>
+              </a:spcAft>
+            </a:pPr>
+            <a:r>
+              <a:rPr sz="1500">
+                <a:solidFill>
+                  <a:srgbClr val="22282E"/>
+                </a:solidFill>
+              </a:rPr>
+              <a:t>•  Explica por qué AdminSDHolder es tan resistente a la limpieza.</a:t>
+            </a:r>
+          </a:p>
+          <a:p>
+            <a:pPr>
+              <a:spcAft>
+                <a:spcPts val="600"/>
+              </a:spcAft>
+            </a:pPr>
+            <a:r>
+              <a:rPr sz="1500">
+                <a:solidFill>
+                  <a:srgbClr val="22282E"/>
+                </a:solidFill>
+              </a:rPr>
+              <a:t>•  Describe el flujo de DCShadow y qué lo hace sigiloso.</a:t>
+            </a:r>
+          </a:p>
+          <a:p>
+            <a:pPr>
+              <a:spcAft>
+                <a:spcPts val="600"/>
+              </a:spcAft>
+            </a:pPr>
+            <a:r>
+              <a:rPr sz="1500">
+                <a:solidFill>
+                  <a:srgbClr val="22282E"/>
+                </a:solidFill>
+              </a:rPr>
+              <a:t>•  Configura RBCD y úsalo para impersonar a un admin en el lab.</a:t>
+            </a:r>
+          </a:p>
+          <a:p>
+            <a:pPr>
+              <a:spcAft>
+                <a:spcPts val="600"/>
+              </a:spcAft>
+            </a:pPr>
+            <a:r>
+              <a:rPr sz="1500">
+                <a:solidFill>
+                  <a:srgbClr val="22282E"/>
+                </a:solidFill>
+              </a:rPr>
+              <a:t>•  Compara Golden vs Diamond Ticket en detectabilidad.</a:t>
+            </a:r>
+          </a:p>
+          <a:p>
+            <a:pPr>
+              <a:spcAft>
+                <a:spcPts val="600"/>
+              </a:spcAft>
+            </a:pPr>
+            <a:r>
+              <a:rPr sz="1500">
+                <a:solidFill>
+                  <a:srgbClr val="22282E"/>
+                </a:solidFill>
+              </a:rPr>
+              <a:t>•  Redacta un checklist de erradicación de persistencia en AD.</a:t>
             </a:r>
           </a:p>
         </p:txBody>
@@ -3347,7 +3365,7 @@
                   <a:srgbClr val="0B3D2E"/>
                 </a:solidFill>
               </a:rPr>
-              <a:t>❓ Preguntas frecuentes</a:t>
+              <a:t>📝 Reto verificable</a:t>
             </a:r>
           </a:p>
         </p:txBody>
@@ -3385,82 +3403,22 @@
                   <a:srgbClr val="22282E"/>
                 </a:solidFill>
               </a:rPr>
-              <a:t>•  ❓ ¿Por qué basta un reset simple de contraseñas para NO limpiar el dominio?</a:t>
-            </a:r>
-          </a:p>
-          <a:p>
-            <a:pPr>
-              <a:spcAft>
-                <a:spcPts val="600"/>
-              </a:spcAft>
-            </a:pPr>
-            <a:r>
-              <a:rPr sz="1500">
-                <a:solidFill>
-                  <a:srgbClr val="22282E"/>
-                </a:solidFill>
-              </a:rPr>
-              <a:t>•  Porque la persistencia moderna vive en ACLs, delegaciones y krbtgt, no en contraseñas de usuario. La erradicación exige revisar el directorio, no solo credenciales.</a:t>
-            </a:r>
-          </a:p>
-          <a:p>
-            <a:pPr>
-              <a:spcAft>
-                <a:spcPts val="600"/>
-              </a:spcAft>
-            </a:pPr>
-            <a:r>
-              <a:rPr sz="1500">
-                <a:solidFill>
-                  <a:srgbClr val="22282E"/>
-                </a:solidFill>
-              </a:rPr>
-              <a:t>•  ❓ ¿DCShadow deja rastro?</a:t>
-            </a:r>
-          </a:p>
-          <a:p>
-            <a:pPr>
-              <a:spcAft>
-                <a:spcPts val="600"/>
-              </a:spcAft>
-            </a:pPr>
-            <a:r>
-              <a:rPr sz="1500">
-                <a:solidFill>
-                  <a:srgbClr val="22282E"/>
-                </a:solidFill>
-              </a:rPr>
-              <a:t>•  Menos que una modificación normal, pero el registro efímero del DC falso y ciertos eventos de replicación pueden delatarlo con la auditoría adecuada.</a:t>
-            </a:r>
-          </a:p>
-          <a:p>
-            <a:pPr>
-              <a:spcAft>
-                <a:spcPts val="600"/>
-              </a:spcAft>
-            </a:pPr>
-            <a:r>
-              <a:rPr sz="1500">
-                <a:solidFill>
-                  <a:srgbClr val="22282E"/>
-                </a:solidFill>
-              </a:rPr>
-              <a:t>•  ❓ ¿Cuándo se retira la persistencia en un engagement real?</a:t>
-            </a:r>
-          </a:p>
-          <a:p>
-            <a:pPr>
-              <a:spcAft>
-                <a:spcPts val="600"/>
-              </a:spcAft>
-            </a:pPr>
-            <a:r>
-              <a:rPr sz="1500">
-                <a:solidFill>
-                  <a:srgbClr val="22282E"/>
-                </a:solidFill>
-              </a:rPr>
-              <a:t>•  Siempre al cierre, con inventario completo de lo instalado. Dejar persistencia es una falta grave: se documenta y se elimina.</a:t>
+              <a:t>•  Instala dos técnicas de persistencia distintas en tu AD lab, luego cambia de rol y detéctalas y erradícalas documentando cómo lo harías como Blue Team.</a:t>
+            </a:r>
+          </a:p>
+          <a:p>
+            <a:pPr>
+              <a:spcAft>
+                <a:spcPts val="600"/>
+              </a:spcAft>
+            </a:pPr>
+            <a:r>
+              <a:rPr sz="1500">
+                <a:solidFill>
+                  <a:srgbClr val="22282E"/>
+                </a:solidFill>
+              </a:rPr>
+              <a:t>•  Criterio de aceptación: demuestras que ambas persistencias otorgan acceso tras un "reinicio" o cambio de contraseña de la cuenta original, y luego presentas los eventos/consultas que las detectan y…</a:t>
             </a:r>
           </a:p>
         </p:txBody>
@@ -3511,7 +3469,7 @@
                   <a:srgbClr val="0B3D2E"/>
                 </a:solidFill>
               </a:rPr>
-              <a:t>🔗 Referencias</a:t>
+              <a:t>⚠️ Errores comunes</a:t>
             </a:r>
           </a:p>
         </p:txBody>
@@ -3549,56 +3507,459 @@
                   <a:srgbClr val="22282E"/>
                 </a:solidFill>
               </a:rPr>
-              <a:t>•  The Hacker Recipes — AD persistence. &lt;https://www.thehacker.recipes/ad/persistence/&gt;</a:t>
-            </a:r>
-          </a:p>
-          <a:p>
-            <a:pPr>
-              <a:spcAft>
-                <a:spcPts val="600"/>
-              </a:spcAft>
-            </a:pPr>
-            <a:r>
-              <a:rPr sz="1500">
-                <a:solidFill>
-                  <a:srgbClr val="22282E"/>
-                </a:solidFill>
-              </a:rPr>
-              <a:t>•  MITRE ATT&amp;CK — Persistence (TA0003). &lt;https://attack.mitre.org/tactics/TA0003/&gt;</a:t>
-            </a:r>
-          </a:p>
-          <a:p>
-            <a:pPr>
-              <a:spcAft>
-                <a:spcPts val="600"/>
-              </a:spcAft>
-            </a:pPr>
-            <a:r>
-              <a:rPr sz="1500">
-                <a:solidFill>
-                  <a:srgbClr val="22282E"/>
-                </a:solidFill>
-              </a:rPr>
-              <a:t>•  Microsoft — AdminSDHolder / SDProp. &lt;https://learn.microsoft.com/&gt;</a:t>
-            </a:r>
-          </a:p>
-          <a:p>
-            <a:pPr>
-              <a:spcAft>
-                <a:spcPts val="600"/>
-              </a:spcAft>
-            </a:pPr>
-            <a:r>
-              <a:rPr sz="1500">
-                <a:solidFill>
-                  <a:srgbClr val="22282E"/>
-                </a:solidFill>
-              </a:rPr>
-              <a:t>•  SpecterOps — research sobre RBCD y delegación.</a:t>
-            </a:r>
-          </a:p>
-        </p:txBody>
-      </p:sp>
+              <a:t>•  La persistencia por ACL se borra — No usaste AdminSDHolder; SDProp la reinyecta si la pones ahí</a:t>
+            </a:r>
+          </a:p>
+          <a:p>
+            <a:pPr>
+              <a:spcAft>
+                <a:spcPts val="600"/>
+              </a:spcAft>
+            </a:pPr>
+            <a:r>
+              <a:rPr sz="1500">
+                <a:solidFill>
+                  <a:srgbClr val="22282E"/>
+                </a:solidFill>
+              </a:rPr>
+              <a:t>•  DCShadow falla — Requiere privilegios altos y condiciones específicas; revisa requisitos</a:t>
+            </a:r>
+          </a:p>
+          <a:p>
+            <a:pPr>
+              <a:spcAft>
+                <a:spcPts val="600"/>
+              </a:spcAft>
+            </a:pPr>
+            <a:r>
+              <a:rPr sz="1500">
+                <a:solidFill>
+                  <a:srgbClr val="22282E"/>
+                </a:solidFill>
+              </a:rPr>
+              <a:t>•  RBCD no impersona — msDS-AllowedToActOnBehalfOfOtherIdentity mal configurado; corrige el descriptor</a:t>
+            </a:r>
+          </a:p>
+          <a:p>
+            <a:pPr>
+              <a:spcAft>
+                <a:spcPts val="600"/>
+              </a:spcAft>
+            </a:pPr>
+            <a:r>
+              <a:rPr sz="1500">
+                <a:solidFill>
+                  <a:srgbClr val="22282E"/>
+                </a:solidFill>
+              </a:rPr>
+              <a:t>•  Erradicación incompleta — Olvidaste resetear krbtgt (x2) o revisar delegaciones; usa el checklist</a:t>
+            </a:r>
+          </a:p>
+          <a:p>
+            <a:pPr>
+              <a:spcAft>
+                <a:spcPts val="600"/>
+              </a:spcAft>
+            </a:pPr>
+            <a:r>
+              <a:rPr sz="1500">
+                <a:solidFill>
+                  <a:srgbClr val="22282E"/>
+                </a:solidFill>
+              </a:rPr>
+              <a:t>•  Persistencia detectada al instante — Cambios de ACL auditados (5136); es telemetría esperable</a:t>
+            </a:r>
+          </a:p>
+        </p:txBody>
+      </p:sp>
+    </p:spTree>
+  </p:cSld>
+  <p:clrMapOvr>
+    <a:masterClrMapping/>
+  </p:clrMapOvr>
+</p:sld>
+</file>
+
+<file path=ppt/slides/slide13.xml><?xml version="1.0" encoding="utf-8"?>
+<p:sld xmlns:a="http://schemas.openxmlformats.org/drawingml/2006/main" xmlns:p="http://schemas.openxmlformats.org/presentationml/2006/main" xmlns:r="http://schemas.openxmlformats.org/officeDocument/2006/relationships">
+  <p:cSld>
+    <p:spTree>
+      <p:nvGrpSpPr>
+        <p:cNvPr id="1" name=""/>
+        <p:cNvGrpSpPr/>
+        <p:nvPr/>
+      </p:nvGrpSpPr>
+      <p:grpSpPr/>
+      <p:sp>
+        <p:nvSpPr>
+          <p:cNvPr id="2" name="TextBox 1"/>
+          <p:cNvSpPr txBox="1"/>
+          <p:nvPr/>
+        </p:nvSpPr>
+        <p:spPr>
+          <a:xfrm>
+            <a:off x="457200" y="320040"/>
+            <a:ext cx="8229600" cy="822960"/>
+          </a:xfrm>
+          <a:prstGeom prst="rect">
+            <a:avLst/>
+          </a:prstGeom>
+          <a:noFill/>
+        </p:spPr>
+        <p:txBody>
+          <a:bodyPr wrap="square">
+            <a:spAutoFit/>
+          </a:bodyPr>
+          <a:lstStyle/>
+          <a:p>
+            <a:r>
+              <a:rPr sz="2600" b="1">
+                <a:solidFill>
+                  <a:srgbClr val="0B3D2E"/>
+                </a:solidFill>
+              </a:rPr>
+              <a:t>❓ Preguntas frecuentes</a:t>
+            </a:r>
+          </a:p>
+        </p:txBody>
+      </p:sp>
+      <p:sp>
+        <p:nvSpPr>
+          <p:cNvPr id="3" name="TextBox 2"/>
+          <p:cNvSpPr txBox="1"/>
+          <p:nvPr/>
+        </p:nvSpPr>
+        <p:spPr>
+          <a:xfrm>
+            <a:off x="457200" y="1280160"/>
+            <a:ext cx="8229600" cy="4937760"/>
+          </a:xfrm>
+          <a:prstGeom prst="rect">
+            <a:avLst/>
+          </a:prstGeom>
+          <a:noFill/>
+        </p:spPr>
+        <p:txBody>
+          <a:bodyPr wrap="square">
+            <a:spAutoFit/>
+          </a:bodyPr>
+          <a:lstStyle/>
+          <a:p>
+            <a:pPr>
+              <a:spcAft>
+                <a:spcPts val="600"/>
+              </a:spcAft>
+            </a:pPr>
+            <a:r>
+              <a:rPr sz="1500">
+                <a:solidFill>
+                  <a:srgbClr val="22282E"/>
+                </a:solidFill>
+              </a:rPr>
+              <a:t>•  ❓ ¿Por qué basta un reset simple de contraseñas para NO limpiar el dominio?</a:t>
+            </a:r>
+          </a:p>
+          <a:p>
+            <a:pPr>
+              <a:spcAft>
+                <a:spcPts val="600"/>
+              </a:spcAft>
+            </a:pPr>
+            <a:r>
+              <a:rPr sz="1500">
+                <a:solidFill>
+                  <a:srgbClr val="22282E"/>
+                </a:solidFill>
+              </a:rPr>
+              <a:t>•  Porque la persistencia moderna vive en ACLs, delegaciones y krbtgt, no en contraseñas de usuario. La erradicación exige revisar el directorio, no solo credenciales.</a:t>
+            </a:r>
+          </a:p>
+          <a:p>
+            <a:pPr>
+              <a:spcAft>
+                <a:spcPts val="600"/>
+              </a:spcAft>
+            </a:pPr>
+            <a:r>
+              <a:rPr sz="1500">
+                <a:solidFill>
+                  <a:srgbClr val="22282E"/>
+                </a:solidFill>
+              </a:rPr>
+              <a:t>•  ❓ ¿DCShadow deja rastro?</a:t>
+            </a:r>
+          </a:p>
+          <a:p>
+            <a:pPr>
+              <a:spcAft>
+                <a:spcPts val="600"/>
+              </a:spcAft>
+            </a:pPr>
+            <a:r>
+              <a:rPr sz="1500">
+                <a:solidFill>
+                  <a:srgbClr val="22282E"/>
+                </a:solidFill>
+              </a:rPr>
+              <a:t>•  Menos que una modificación normal, pero el registro efímero del DC falso y ciertos eventos de replicación pueden delatarlo con la auditoría adecuada.</a:t>
+            </a:r>
+          </a:p>
+          <a:p>
+            <a:pPr>
+              <a:spcAft>
+                <a:spcPts val="600"/>
+              </a:spcAft>
+            </a:pPr>
+            <a:r>
+              <a:rPr sz="1500">
+                <a:solidFill>
+                  <a:srgbClr val="22282E"/>
+                </a:solidFill>
+              </a:rPr>
+              <a:t>•  ❓ ¿Cuándo se retira la persistencia en un engagement real?</a:t>
+            </a:r>
+          </a:p>
+          <a:p>
+            <a:pPr>
+              <a:spcAft>
+                <a:spcPts val="600"/>
+              </a:spcAft>
+            </a:pPr>
+            <a:r>
+              <a:rPr sz="1500">
+                <a:solidFill>
+                  <a:srgbClr val="22282E"/>
+                </a:solidFill>
+              </a:rPr>
+              <a:t>•  Siempre al cierre, con inventario completo de lo instalado. Dejar persistencia es una falta grave: se documenta y se elimina.</a:t>
+            </a:r>
+          </a:p>
+        </p:txBody>
+      </p:sp>
+    </p:spTree>
+  </p:cSld>
+  <p:clrMapOvr>
+    <a:masterClrMapping/>
+  </p:clrMapOvr>
+</p:sld>
+</file>
+
+<file path=ppt/slides/slide14.xml><?xml version="1.0" encoding="utf-8"?>
+<p:sld xmlns:a="http://schemas.openxmlformats.org/drawingml/2006/main" xmlns:p="http://schemas.openxmlformats.org/presentationml/2006/main" xmlns:r="http://schemas.openxmlformats.org/officeDocument/2006/relationships">
+  <p:cSld>
+    <p:spTree>
+      <p:nvGrpSpPr>
+        <p:cNvPr id="1" name=""/>
+        <p:cNvGrpSpPr/>
+        <p:nvPr/>
+      </p:nvGrpSpPr>
+      <p:grpSpPr/>
+      <p:sp>
+        <p:nvSpPr>
+          <p:cNvPr id="2" name="TextBox 1"/>
+          <p:cNvSpPr txBox="1"/>
+          <p:nvPr/>
+        </p:nvSpPr>
+        <p:spPr>
+          <a:xfrm>
+            <a:off x="457200" y="320040"/>
+            <a:ext cx="8229600" cy="822960"/>
+          </a:xfrm>
+          <a:prstGeom prst="rect">
+            <a:avLst/>
+          </a:prstGeom>
+          <a:noFill/>
+        </p:spPr>
+        <p:txBody>
+          <a:bodyPr wrap="square">
+            <a:spAutoFit/>
+          </a:bodyPr>
+          <a:lstStyle/>
+          <a:p>
+            <a:r>
+              <a:rPr sz="2600" b="1">
+                <a:solidFill>
+                  <a:srgbClr val="0B3D2E"/>
+                </a:solidFill>
+              </a:rPr>
+              <a:t>🔗 Referencias</a:t>
+            </a:r>
+          </a:p>
+        </p:txBody>
+      </p:sp>
+      <p:sp>
+        <p:nvSpPr>
+          <p:cNvPr id="3" name="TextBox 2"/>
+          <p:cNvSpPr txBox="1"/>
+          <p:nvPr/>
+        </p:nvSpPr>
+        <p:spPr>
+          <a:xfrm>
+            <a:off x="457200" y="1280160"/>
+            <a:ext cx="8229600" cy="4937760"/>
+          </a:xfrm>
+          <a:prstGeom prst="rect">
+            <a:avLst/>
+          </a:prstGeom>
+          <a:noFill/>
+        </p:spPr>
+        <p:txBody>
+          <a:bodyPr wrap="square">
+            <a:spAutoFit/>
+          </a:bodyPr>
+          <a:lstStyle/>
+          <a:p>
+            <a:pPr>
+              <a:spcAft>
+                <a:spcPts val="600"/>
+              </a:spcAft>
+            </a:pPr>
+            <a:r>
+              <a:rPr sz="1500">
+                <a:solidFill>
+                  <a:srgbClr val="22282E"/>
+                </a:solidFill>
+              </a:rPr>
+              <a:t>•  Microsoft — Protected Accounts and Groups in Active Directory. &lt;https://learn.microsoft.com/en-us/previous-versions/windows/it-pro/windows-server-2012-r2-and-2012/dn535499%28v%3Dws.11%29&gt; — fuente…</a:t>
+            </a:r>
+          </a:p>
+          <a:p>
+            <a:pPr>
+              <a:spcAft>
+                <a:spcPts val="600"/>
+              </a:spcAft>
+            </a:pPr>
+            <a:r>
+              <a:rPr sz="1500">
+                <a:solidFill>
+                  <a:srgbClr val="22282E"/>
+                </a:solidFill>
+              </a:rPr>
+              <a:t>•  Microsoft — Accounts security posture assessments. &lt;https://learn.microsoft.com/en-us/defender-for-identity/security-posture-assessments/accounts&gt; — referencia defensiva para permisos sospechosos…</a:t>
+            </a:r>
+          </a:p>
+          <a:p>
+            <a:pPr>
+              <a:spcAft>
+                <a:spcPts val="600"/>
+              </a:spcAft>
+            </a:pPr>
+            <a:r>
+              <a:rPr sz="1500">
+                <a:solidFill>
+                  <a:srgbClr val="22282E"/>
+                </a:solidFill>
+              </a:rPr>
+              <a:t>•  MITRE ATT&amp;CK — Domain or Tenant Policy Modification (T1484). &lt;https://attack.mitre.org/techniques/T1484/&gt; — clasificación de cambios de GPO, delegación, confianzas y controladores no autorizados.</a:t>
+            </a:r>
+          </a:p>
+          <a:p>
+            <a:pPr>
+              <a:spcAft>
+                <a:spcPts val="600"/>
+              </a:spcAft>
+            </a:pPr>
+            <a:r>
+              <a:rPr sz="1500">
+                <a:solidFill>
+                  <a:srgbClr val="22282E"/>
+                </a:solidFill>
+              </a:rPr>
+              <a:t>•  MITRE ATT&amp;CK — Account Manipulation (T1098). &lt;https://attack.mitre.org/techniques/T1098/&gt; — base para persistencia mediante cuentas y material de autenticación.</a:t>
+            </a:r>
+          </a:p>
+          <a:p>
+            <a:pPr>
+              <a:spcAft>
+                <a:spcPts val="600"/>
+              </a:spcAft>
+            </a:pPr>
+            <a:r>
+              <a:rPr sz="1500">
+                <a:solidFill>
+                  <a:srgbClr val="22282E"/>
+                </a:solidFill>
+              </a:rPr>
+              <a:t>•  Microsoft — Best Practices for Securing Active Directory. &lt;https://learn.microsoft.com/en-us/windows-server/identity/ad-ds/plan/security-best-practices/best-practices-for-securing-active-directory&gt; —…</a:t>
+            </a:r>
+          </a:p>
+        </p:txBody>
+      </p:sp>
+    </p:spTree>
+  </p:cSld>
+  <p:clrMapOvr>
+    <a:masterClrMapping/>
+  </p:clrMapOvr>
+</p:sld>
+</file>
+
+<file path=ppt/slides/slide15.xml><?xml version="1.0" encoding="utf-8"?>
+<p:sld xmlns:a="http://schemas.openxmlformats.org/drawingml/2006/main" xmlns:p="http://schemas.openxmlformats.org/presentationml/2006/main" xmlns:r="http://schemas.openxmlformats.org/officeDocument/2006/relationships">
+  <p:cSld>
+    <p:spTree>
+      <p:nvGrpSpPr>
+        <p:cNvPr id="1" name=""/>
+        <p:cNvGrpSpPr/>
+        <p:nvPr/>
+      </p:nvGrpSpPr>
+      <p:grpSpPr/>
+      <p:sp>
+        <p:nvSpPr>
+          <p:cNvPr id="2" name="TextBox 1"/>
+          <p:cNvSpPr txBox="1"/>
+          <p:nvPr/>
+        </p:nvSpPr>
+        <p:spPr>
+          <a:xfrm>
+            <a:off x="457200" y="274320"/>
+            <a:ext cx="8229600" cy="640080"/>
+          </a:xfrm>
+          <a:prstGeom prst="rect">
+            <a:avLst/>
+          </a:prstGeom>
+          <a:noFill/>
+        </p:spPr>
+        <p:txBody>
+          <a:bodyPr wrap="square">
+            <a:spAutoFit/>
+          </a:bodyPr>
+          <a:lstStyle/>
+          <a:p>
+            <a:r>
+              <a:rPr sz="2200" b="1">
+                <a:solidFill>
+                  <a:srgbClr val="0B3D2E"/>
+                </a:solidFill>
+              </a:rPr>
+              <a:t>Diagrama de la clase</a:t>
+            </a:r>
+          </a:p>
+        </p:txBody>
+      </p:sp>
+      <p:pic>
+        <p:nvPicPr>
+          <p:cNvPr id="3" name="Picture 2" descr="a8ee0ef61e2a58cd.png"/>
+          <p:cNvPicPr>
+            <a:picLocks noChangeAspect="1"/>
+          </p:cNvPicPr>
+          <p:nvPr/>
+        </p:nvPicPr>
+        <p:blipFill>
+          <a:blip r:embed="rId2"/>
+          <a:stretch>
+            <a:fillRect/>
+          </a:stretch>
+        </p:blipFill>
+        <p:spPr>
+          <a:xfrm>
+            <a:off x="735048" y="1097280"/>
+            <a:ext cx="7673903" cy="5303520"/>
+          </a:xfrm>
+          <a:prstGeom prst="rect">
+            <a:avLst/>
+          </a:prstGeom>
+        </p:spPr>
+      </p:pic>
     </p:spTree>
   </p:cSld>
   <p:clrMapOvr>
@@ -3683,7 +4044,7 @@
                   <a:srgbClr val="22282E"/>
                 </a:solidFill>
               </a:rPr>
-              <a:t>•  Estudiar las técnicas para mantener el acceso a un dominio comprometido a lo largo del tiempo, sobreviviendo a reinicios y remediaciones parciales: DCShadow, AdminSDHolder, delegación abusiva, ACLs persistentes, Golden/Diamond Ticket y cuentas ocultas. El alumno aprenderá a instalar y, sobre todo, a detectar y erradicar persistencia en su AD lab.</a:t>
+              <a:t>•  Estudiar las técnicas para mantener el acceso a un dominio comprometido a lo largo del tiempo, sobreviviendo a reinicios y remediaciones parciales: DCShadow, AdminSDHolder, delegación abusiva, ACLs…</a:t>
             </a:r>
           </a:p>
         </p:txBody>
@@ -4077,7 +4438,7 @@
                   <a:srgbClr val="0B3D2E"/>
                 </a:solidFill>
               </a:rPr>
-              <a:t>📖 Definiciones y características</a:t>
+              <a:t>🧠 Explicación en profundidad</a:t>
             </a:r>
           </a:p>
         </p:txBody>
@@ -4115,82 +4476,97 @@
                   <a:srgbClr val="22282E"/>
                 </a:solidFill>
               </a:rPr>
-              <a:t>•  AdminSDHolder: objeto cuya ACL se propaga a cuentas protegidas cada ~60 min (SDProp). Característica: modificarla reinyecta permisos aunque los borren.</a:t>
-            </a:r>
-          </a:p>
-          <a:p>
-            <a:pPr>
-              <a:spcAft>
-                <a:spcPts val="600"/>
-              </a:spcAft>
-            </a:pPr>
-            <a:r>
-              <a:rPr sz="1500">
-                <a:solidFill>
-                  <a:srgbClr val="22282E"/>
-                </a:solidFill>
-              </a:rPr>
-              <a:t>•  DCShadow: registrar temporalmente un DC ilegítimo para inyectar cambios replicados. Característica: evita muchos logs de modificación.</a:t>
-            </a:r>
-          </a:p>
-          <a:p>
-            <a:pPr>
-              <a:spcAft>
-                <a:spcPts val="600"/>
-              </a:spcAft>
-            </a:pPr>
-            <a:r>
-              <a:rPr sz="1500">
-                <a:solidFill>
-                  <a:srgbClr val="22282E"/>
-                </a:solidFill>
-              </a:rPr>
-              <a:t>•  RBCD (Resource-Based Constrained Delegation): delegación configurable por el objeto destino. Característica: abusable como puerta trasera de acceso.</a:t>
-            </a:r>
-          </a:p>
-          <a:p>
-            <a:pPr>
-              <a:spcAft>
-                <a:spcPts val="600"/>
-              </a:spcAft>
-            </a:pPr>
-            <a:r>
-              <a:rPr sz="1500">
-                <a:solidFill>
-                  <a:srgbClr val="22282E"/>
-                </a:solidFill>
-              </a:rPr>
-              <a:t>•  DSRM: cuenta de recuperación local del DC. Característica: su uso como logon de red es una persistencia sigilosa.</a:t>
-            </a:r>
-          </a:p>
-          <a:p>
-            <a:pPr>
-              <a:spcAft>
-                <a:spcPts val="600"/>
-              </a:spcAft>
-            </a:pPr>
-            <a:r>
-              <a:rPr sz="1500">
-                <a:solidFill>
-                  <a:srgbClr val="22282E"/>
-                </a:solidFill>
-              </a:rPr>
-              <a:t>•  Diamond Ticket: TGT modificado (no forjado desde cero) para parecer legítimo. Característica: más difícil de detectar que el Golden.</a:t>
-            </a:r>
-          </a:p>
-          <a:p>
-            <a:pPr>
-              <a:spcAft>
-                <a:spcPts val="600"/>
-              </a:spcAft>
-            </a:pPr>
-            <a:r>
-              <a:rPr sz="1500">
-                <a:solidFill>
-                  <a:srgbClr val="22282E"/>
-                </a:solidFill>
-              </a:rPr>
-              <a:t>•  Shadow admin: cuenta sin membresía obvia pero con permisos equivalentes vía ACLs. Característica: invisible a auditorías superficiales.</a:t>
+              <a:t>•  La persistencia de dominio no se limita a crear una cuenta. Puede esconderse en permisos, delegaciones, políticas, cuentas de equipo, claves de servicio o configuraciones que sobreviven al cierre de…</a:t>
+            </a:r>
+          </a:p>
+          <a:p>
+            <a:pPr>
+              <a:spcAft>
+                <a:spcPts val="600"/>
+              </a:spcAft>
+            </a:pPr>
+            <a:r>
+              <a:rPr sz="1500">
+                <a:solidFill>
+                  <a:srgbClr val="22282E"/>
+                </a:solidFill>
+              </a:rPr>
+              <a:t>•  Cada cambio tiene tres dimensiones: objeto modificado, autoridad necesaria y proceso que vuelve efectivo el cambio. Documentarlas permite detectar y revertir sin depender del nombre de una…</a:t>
+            </a:r>
+          </a:p>
+          <a:p>
+            <a:pPr>
+              <a:spcAft>
+                <a:spcPts val="600"/>
+              </a:spcAft>
+            </a:pPr>
+            <a:r>
+              <a:rPr sz="1500">
+                <a:solidFill>
+                  <a:srgbClr val="22282E"/>
+                </a:solidFill>
+              </a:rPr>
+              <a:t>•  Microsoft describe AdminSDHolder como el objeto cuya ACL sirve de plantilla para cuentas y grupos protegidos. SDProp, ejecutado por defecto cada 60 minutos en el DC con rol de emulador PDC, compara y…</a:t>
+            </a:r>
+          </a:p>
+          <a:p>
+            <a:pPr>
+              <a:spcAft>
+                <a:spcPts val="600"/>
+              </a:spcAft>
+            </a:pPr>
+            <a:r>
+              <a:rPr sz="1500">
+                <a:solidFill>
+                  <a:srgbClr val="22282E"/>
+                </a:solidFill>
+              </a:rPr>
+              <a:t>•  Esto explica además un problema legítimo: al retirar una cuenta de un grupo protegido, adminCount y la herencia pueden no volver automáticamente al estado esperado. La respuesta no borra permisos a…</a:t>
+            </a:r>
+          </a:p>
+          <a:p>
+            <a:pPr>
+              <a:spcAft>
+                <a:spcPts val="600"/>
+              </a:spcAft>
+            </a:pPr>
+            <a:r>
+              <a:rPr sz="1500">
+                <a:solidFill>
+                  <a:srgbClr val="22282E"/>
+                </a:solidFill>
+              </a:rPr>
+              <a:t>•  En RBCD, el recurso destino define qué principal puede actuar en nombre de usuarios frente a él mediante un atributo de la cuenta de equipo. El riesgo no es que la característica sea maliciosa, sino…</a:t>
+            </a:r>
+          </a:p>
+          <a:p>
+            <a:pPr>
+              <a:spcAft>
+                <a:spcPts val="600"/>
+              </a:spcAft>
+            </a:pPr>
+            <a:r>
+              <a:rPr sz="1500">
+                <a:solidFill>
+                  <a:srgbClr val="22282E"/>
+                </a:solidFill>
+              </a:rPr>
+              <a:t>•  DCShadow pertenece a otra categoría: introducir cambios mediante el flujo de replicación. La detección mira registro de controladores, topología y origen de replicación, no solo modificaciones LDAP.…</a:t>
+            </a:r>
+          </a:p>
+          <a:p>
+            <a:pPr>
+              <a:spcAft>
+                <a:spcPts val="600"/>
+              </a:spcAft>
+            </a:pPr>
+            <a:r>
+              <a:rPr sz="1500">
+                <a:solidFill>
+                  <a:srgbClr val="22282E"/>
+                </a:solidFill>
+              </a:rPr>
+              <a:t>•  Se parte de una instantánea de objetos privilegiados, ACL, propietarios, delegaciones, GPO, cuentas de equipo y derechos de replicación. Después se revoca la relación persistente, se rotan secretos…</a:t>
             </a:r>
           </a:p>
         </p:txBody>
@@ -4241,7 +4617,7 @@
                   <a:srgbClr val="0B3D2E"/>
                 </a:solidFill>
               </a:rPr>
-              <a:t>🧰 Herramientas y preparación</a:t>
+              <a:t>📖 Definiciones y características</a:t>
             </a:r>
           </a:p>
         </p:txBody>
@@ -4279,37 +4655,82 @@
                   <a:srgbClr val="22282E"/>
                 </a:solidFill>
               </a:rPr>
-              <a:t>•  AD lab / GOAD con acceso previo de alto privilegio (de la Clase 174).</a:t>
-            </a:r>
-          </a:p>
-          <a:p>
-            <a:pPr>
-              <a:spcAft>
-                <a:spcPts val="600"/>
-              </a:spcAft>
-            </a:pPr>
-            <a:r>
-              <a:rPr sz="1500">
-                <a:solidFill>
-                  <a:srgbClr val="22282E"/>
-                </a:solidFill>
-              </a:rPr>
-              <a:t>•  Mimikatz (DCShadow, DSRM), PowerView/Set-DomainObjectOwner, Impacket, Rubeus para tickets.</a:t>
-            </a:r>
-          </a:p>
-          <a:p>
-            <a:pPr>
-              <a:spcAft>
-                <a:spcPts val="600"/>
-              </a:spcAft>
-            </a:pPr>
-            <a:r>
-              <a:rPr sz="1500">
-                <a:solidFill>
-                  <a:srgbClr val="22282E"/>
-                </a:solidFill>
-              </a:rPr>
-              <a:t>•  Sysmon + auditoría de cambios en AD (Parte 8) para la fase de detección.</a:t>
+              <a:t>•  AdminSDHolder: objeto cuya ACL se propaga a cuentas protegidas cada ~60 min (SDProp). Característica: modificarla reinyecta permisos aunque los borren.</a:t>
+            </a:r>
+          </a:p>
+          <a:p>
+            <a:pPr>
+              <a:spcAft>
+                <a:spcPts val="600"/>
+              </a:spcAft>
+            </a:pPr>
+            <a:r>
+              <a:rPr sz="1500">
+                <a:solidFill>
+                  <a:srgbClr val="22282E"/>
+                </a:solidFill>
+              </a:rPr>
+              <a:t>•  DCShadow: registrar temporalmente un DC ilegítimo para inyectar cambios replicados. Característica: evita muchos logs de modificación.</a:t>
+            </a:r>
+          </a:p>
+          <a:p>
+            <a:pPr>
+              <a:spcAft>
+                <a:spcPts val="600"/>
+              </a:spcAft>
+            </a:pPr>
+            <a:r>
+              <a:rPr sz="1500">
+                <a:solidFill>
+                  <a:srgbClr val="22282E"/>
+                </a:solidFill>
+              </a:rPr>
+              <a:t>•  RBCD (Resource-Based Constrained Delegation): delegación configurable por el objeto destino. Característica: abusable como puerta trasera de acceso.</a:t>
+            </a:r>
+          </a:p>
+          <a:p>
+            <a:pPr>
+              <a:spcAft>
+                <a:spcPts val="600"/>
+              </a:spcAft>
+            </a:pPr>
+            <a:r>
+              <a:rPr sz="1500">
+                <a:solidFill>
+                  <a:srgbClr val="22282E"/>
+                </a:solidFill>
+              </a:rPr>
+              <a:t>•  DSRM: cuenta local de recuperación del DC. Característica: su posibilidad de inicio de sesión y uso remoto depende de configuración y debe restringirse y auditarse.</a:t>
+            </a:r>
+          </a:p>
+          <a:p>
+            <a:pPr>
+              <a:spcAft>
+                <a:spcPts val="600"/>
+              </a:spcAft>
+            </a:pPr>
+            <a:r>
+              <a:rPr sz="1500">
+                <a:solidFill>
+                  <a:srgbClr val="22282E"/>
+                </a:solidFill>
+              </a:rPr>
+              <a:t>•  Diamond Ticket: TGT legítimamente emitido cuyo contenido se modifica usando material de krbtgt. Característica: cambia algunos artefactos frente a un Golden Ticket, pero no garantiza menor detección.</a:t>
+            </a:r>
+          </a:p>
+          <a:p>
+            <a:pPr>
+              <a:spcAft>
+                <a:spcPts val="600"/>
+              </a:spcAft>
+            </a:pPr>
+            <a:r>
+              <a:rPr sz="1500">
+                <a:solidFill>
+                  <a:srgbClr val="22282E"/>
+                </a:solidFill>
+              </a:rPr>
+              <a:t>•  Shadow admin: cuenta sin membresía obvia pero con permisos equivalentes vía ACLs. Característica: invisible a auditorías superficiales.</a:t>
             </a:r>
           </a:p>
         </p:txBody>
@@ -4360,7 +4781,7 @@
                   <a:srgbClr val="0B3D2E"/>
                 </a:solidFill>
               </a:rPr>
-              <a:t>🧪 Laboratorio guiado</a:t>
+              <a:t>📔 Glosario</a:t>
             </a:r>
           </a:p>
         </p:txBody>
@@ -4398,97 +4819,97 @@
                   <a:srgbClr val="22282E"/>
                 </a:solidFill>
               </a:rPr>
-              <a:t>•  ACL DCSync persistente. Concede a un usuario de bajo privilegio los derechos de replicación:</a:t>
-            </a:r>
-          </a:p>
-          <a:p>
-            <a:pPr>
-              <a:spcAft>
-                <a:spcPts val="600"/>
-              </a:spcAft>
-            </a:pPr>
-            <a:r>
-              <a:rPr sz="1500">
-                <a:solidFill>
-                  <a:srgbClr val="22282E"/>
-                </a:solidFill>
-              </a:rPr>
-              <a:t>•  Add-DomainObjectAcl -TargetIdentity 'DC=lab,DC=local' -PrincipalIdentity lowuser -Rights DCSync</a:t>
-            </a:r>
-          </a:p>
-          <a:p>
-            <a:pPr>
-              <a:spcAft>
-                <a:spcPts val="600"/>
-              </a:spcAft>
-            </a:pPr>
-            <a:r>
-              <a:rPr sz="1500">
-                <a:solidFill>
-                  <a:srgbClr val="22282E"/>
-                </a:solidFill>
-              </a:rPr>
-              <a:t>•  Verifica que ahora puede hacer DCSync.</a:t>
-            </a:r>
-          </a:p>
-          <a:p>
-            <a:pPr>
-              <a:spcAft>
-                <a:spcPts val="600"/>
-              </a:spcAft>
-            </a:pPr>
-            <a:r>
-              <a:rPr sz="1500">
-                <a:solidFill>
-                  <a:srgbClr val="22282E"/>
-                </a:solidFill>
-              </a:rPr>
-              <a:t>•  AdminSDHolder. Añade una ACE a CN=AdminSDHolder,CN=System,... para tu usuario y espera al ciclo SDProp; comprueba que recupera permisos sobre cuentas protegidas.</a:t>
-            </a:r>
-          </a:p>
-          <a:p>
-            <a:pPr>
-              <a:spcAft>
-                <a:spcPts val="600"/>
-              </a:spcAft>
-            </a:pPr>
-            <a:r>
-              <a:rPr sz="1500">
-                <a:solidFill>
-                  <a:srgbClr val="22282E"/>
-                </a:solidFill>
-              </a:rPr>
-              <a:t>•  DCShadow (estudio). Con Mimikatz, comprende cómo lsadump::dcshadow registra un DC falso para escribir un atributo (ej. SID History) evitando logs habituales.</a:t>
-            </a:r>
-          </a:p>
-          <a:p>
-            <a:pPr>
-              <a:spcAft>
-                <a:spcPts val="600"/>
-              </a:spcAft>
-            </a:pPr>
-            <a:r>
-              <a:rPr sz="1500">
-                <a:solidFill>
-                  <a:srgbClr val="22282E"/>
-                </a:solidFill>
-              </a:rPr>
-              <a:t>•  RBCD como backdoor. Configura delegación basada en recursos sobre una máquina para poder impersonar administradores hacia ella.</a:t>
-            </a:r>
-          </a:p>
-          <a:p>
-            <a:pPr>
-              <a:spcAft>
-                <a:spcPts val="600"/>
-              </a:spcAft>
-            </a:pPr>
-            <a:r>
-              <a:rPr sz="1500">
-                <a:solidFill>
-                  <a:srgbClr val="22282E"/>
-                </a:solidFill>
-              </a:rPr>
-              <a:t>•  DSRM. Estudia cómo habilitar el logon de red con la cuenta DSRM del DC y por qué es persistencia sigilosa.</a:t>
+              <a:t>•  Persistencia: capacidad de conservar acceso tras perder el vector inicial.</a:t>
+            </a:r>
+          </a:p>
+          <a:p>
+            <a:pPr>
+              <a:spcAft>
+                <a:spcPts val="600"/>
+              </a:spcAft>
+            </a:pPr>
+            <a:r>
+              <a:rPr sz="1500">
+                <a:solidFill>
+                  <a:srgbClr val="22282E"/>
+                </a:solidFill>
+              </a:rPr>
+              <a:t>•  Shadow admin: principal con capacidad administrativa indirecta sin membresía privilegiada evidente.</a:t>
+            </a:r>
+          </a:p>
+          <a:p>
+            <a:pPr>
+              <a:spcAft>
+                <a:spcPts val="600"/>
+              </a:spcAft>
+            </a:pPr>
+            <a:r>
+              <a:rPr sz="1500">
+                <a:solidFill>
+                  <a:srgbClr val="22282E"/>
+                </a:solidFill>
+              </a:rPr>
+              <a:t>•  AdminSDHolder: objeto que contiene la plantilla de permisos para objetos protegidos.</a:t>
+            </a:r>
+          </a:p>
+          <a:p>
+            <a:pPr>
+              <a:spcAft>
+                <a:spcPts val="600"/>
+              </a:spcAft>
+            </a:pPr>
+            <a:r>
+              <a:rPr sz="1500">
+                <a:solidFill>
+                  <a:srgbClr val="22282E"/>
+                </a:solidFill>
+              </a:rPr>
+              <a:t>•  SDProp: proceso que compara y propaga descriptores de seguridad a objetos protegidos.</a:t>
+            </a:r>
+          </a:p>
+          <a:p>
+            <a:pPr>
+              <a:spcAft>
+                <a:spcPts val="600"/>
+              </a:spcAft>
+            </a:pPr>
+            <a:r>
+              <a:rPr sz="1500">
+                <a:solidFill>
+                  <a:srgbClr val="22282E"/>
+                </a:solidFill>
+              </a:rPr>
+              <a:t>•  adminCount: atributo asociado a protección administrativa que debe interpretarse con herencia y membresías.</a:t>
+            </a:r>
+          </a:p>
+          <a:p>
+            <a:pPr>
+              <a:spcAft>
+                <a:spcPts val="600"/>
+              </a:spcAft>
+            </a:pPr>
+            <a:r>
+              <a:rPr sz="1500">
+                <a:solidFill>
+                  <a:srgbClr val="22282E"/>
+                </a:solidFill>
+              </a:rPr>
+              <a:t>•  RBCD: delegación Kerberos donde el recurso destino especifica principales autorizados.</a:t>
+            </a:r>
+          </a:p>
+          <a:p>
+            <a:pPr>
+              <a:spcAft>
+                <a:spcPts val="600"/>
+              </a:spcAft>
+            </a:pPr>
+            <a:r>
+              <a:rPr sz="1500">
+                <a:solidFill>
+                  <a:srgbClr val="22282E"/>
+                </a:solidFill>
+              </a:rPr>
+              <a:t>•  Cuenta de equipo: principal de seguridad que representa un sistema unido al dominio.</a:t>
             </a:r>
           </a:p>
         </p:txBody>
@@ -4539,7 +4960,7 @@
                   <a:srgbClr val="0B3D2E"/>
                 </a:solidFill>
               </a:rPr>
-              <a:t>✍️ Ejercicios</a:t>
+              <a:t>🧰 Herramientas y preparación</a:t>
             </a:r>
           </a:p>
         </p:txBody>
@@ -4577,82 +4998,37 @@
                   <a:srgbClr val="22282E"/>
                 </a:solidFill>
               </a:rPr>
-              <a:t>•  Instala persistencia por ACL DCSync y demuéstrala.</a:t>
-            </a:r>
-          </a:p>
-          <a:p>
-            <a:pPr>
-              <a:spcAft>
-                <a:spcPts val="600"/>
-              </a:spcAft>
-            </a:pPr>
-            <a:r>
-              <a:rPr sz="1500">
-                <a:solidFill>
-                  <a:srgbClr val="22282E"/>
-                </a:solidFill>
-              </a:rPr>
-              <a:t>•  Explica por qué AdminSDHolder es tan resistente a la limpieza.</a:t>
-            </a:r>
-          </a:p>
-          <a:p>
-            <a:pPr>
-              <a:spcAft>
-                <a:spcPts val="600"/>
-              </a:spcAft>
-            </a:pPr>
-            <a:r>
-              <a:rPr sz="1500">
-                <a:solidFill>
-                  <a:srgbClr val="22282E"/>
-                </a:solidFill>
-              </a:rPr>
-              <a:t>•  Describe el flujo de DCShadow y qué lo hace sigiloso.</a:t>
-            </a:r>
-          </a:p>
-          <a:p>
-            <a:pPr>
-              <a:spcAft>
-                <a:spcPts val="600"/>
-              </a:spcAft>
-            </a:pPr>
-            <a:r>
-              <a:rPr sz="1500">
-                <a:solidFill>
-                  <a:srgbClr val="22282E"/>
-                </a:solidFill>
-              </a:rPr>
-              <a:t>•  Configura RBCD y úsalo para impersonar a un admin en el lab.</a:t>
-            </a:r>
-          </a:p>
-          <a:p>
-            <a:pPr>
-              <a:spcAft>
-                <a:spcPts val="600"/>
-              </a:spcAft>
-            </a:pPr>
-            <a:r>
-              <a:rPr sz="1500">
-                <a:solidFill>
-                  <a:srgbClr val="22282E"/>
-                </a:solidFill>
-              </a:rPr>
-              <a:t>•  Compara Golden vs Diamond Ticket en detectabilidad.</a:t>
-            </a:r>
-          </a:p>
-          <a:p>
-            <a:pPr>
-              <a:spcAft>
-                <a:spcPts val="600"/>
-              </a:spcAft>
-            </a:pPr>
-            <a:r>
-              <a:rPr sz="1500">
-                <a:solidFill>
-                  <a:srgbClr val="22282E"/>
-                </a:solidFill>
-              </a:rPr>
-              <a:t>•  Redacta un checklist de erradicación de persistencia en AD.</a:t>
+              <a:t>•  AD lab / GOAD con acceso previo de alto privilegio (de la Clase 174).</a:t>
+            </a:r>
+          </a:p>
+          <a:p>
+            <a:pPr>
+              <a:spcAft>
+                <a:spcPts val="600"/>
+              </a:spcAft>
+            </a:pPr>
+            <a:r>
+              <a:rPr sz="1500">
+                <a:solidFill>
+                  <a:srgbClr val="22282E"/>
+                </a:solidFill>
+              </a:rPr>
+              <a:t>•  Mimikatz (DCShadow, DSRM), PowerView/Set-DomainObjectOwner, Impacket, Rubeus para tickets.</a:t>
+            </a:r>
+          </a:p>
+          <a:p>
+            <a:pPr>
+              <a:spcAft>
+                <a:spcPts val="600"/>
+              </a:spcAft>
+            </a:pPr>
+            <a:r>
+              <a:rPr sz="1500">
+                <a:solidFill>
+                  <a:srgbClr val="22282E"/>
+                </a:solidFill>
+              </a:rPr>
+              <a:t>•  Sysmon + auditoría de cambios en AD (Parte 8) para la fase de detección.</a:t>
             </a:r>
           </a:p>
         </p:txBody>
@@ -4703,7 +5079,7 @@
                   <a:srgbClr val="0B3D2E"/>
                 </a:solidFill>
               </a:rPr>
-              <a:t>📝 Reto verificable</a:t>
+              <a:t>🧪 Laboratorio guiado</a:t>
             </a:r>
           </a:p>
         </p:txBody>
@@ -4741,22 +5117,97 @@
                   <a:srgbClr val="22282E"/>
                 </a:solidFill>
               </a:rPr>
-              <a:t>•  Instala dos técnicas de persistencia distintas en tu AD lab, luego cambia de rol y detéctalas y erradícalas documentando cómo lo harías como Blue Team.</a:t>
-            </a:r>
-          </a:p>
-          <a:p>
-            <a:pPr>
-              <a:spcAft>
-                <a:spcPts val="600"/>
-              </a:spcAft>
-            </a:pPr>
-            <a:r>
-              <a:rPr sz="1500">
-                <a:solidFill>
-                  <a:srgbClr val="22282E"/>
-                </a:solidFill>
-              </a:rPr>
-              <a:t>•  Criterio de aceptación: demuestras que ambas persistencias otorgan acceso tras un "reinicio" o cambio de contraseña de la cuenta original, y luego presentas los eventos/consultas que las detectan y el procedimiento que las elimina por completo. Todo en tu laboratorio.</a:t>
+              <a:t>•  ACL DCSync persistente. Concede a un usuario de bajo privilegio los derechos de replicación:</a:t>
+            </a:r>
+          </a:p>
+          <a:p>
+            <a:pPr>
+              <a:spcAft>
+                <a:spcPts val="600"/>
+              </a:spcAft>
+            </a:pPr>
+            <a:r>
+              <a:rPr sz="1500">
+                <a:solidFill>
+                  <a:srgbClr val="22282E"/>
+                </a:solidFill>
+              </a:rPr>
+              <a:t>•  Verifica que ahora puede hacer DCSync.</a:t>
+            </a:r>
+          </a:p>
+          <a:p>
+            <a:pPr>
+              <a:spcAft>
+                <a:spcPts val="600"/>
+              </a:spcAft>
+            </a:pPr>
+            <a:r>
+              <a:rPr sz="1500">
+                <a:solidFill>
+                  <a:srgbClr val="22282E"/>
+                </a:solidFill>
+              </a:rPr>
+              <a:t>•  AdminSDHolder. Añade una ACE a CN=AdminSDHolder,CN=System,... para tu usuario y espera al ciclo SDProp; comprueba que recupera permisos sobre cuentas protegidas.</a:t>
+            </a:r>
+          </a:p>
+          <a:p>
+            <a:pPr>
+              <a:spcAft>
+                <a:spcPts val="600"/>
+              </a:spcAft>
+            </a:pPr>
+            <a:r>
+              <a:rPr sz="1500">
+                <a:solidFill>
+                  <a:srgbClr val="22282E"/>
+                </a:solidFill>
+              </a:rPr>
+              <a:t>•  DCShadow (estudio). Con Mimikatz, comprende cómo lsadump::dcshadow registra un DC falso para escribir un atributo (ej. SID History) evitando logs habituales.</a:t>
+            </a:r>
+          </a:p>
+          <a:p>
+            <a:pPr>
+              <a:spcAft>
+                <a:spcPts val="600"/>
+              </a:spcAft>
+            </a:pPr>
+            <a:r>
+              <a:rPr sz="1500">
+                <a:solidFill>
+                  <a:srgbClr val="22282E"/>
+                </a:solidFill>
+              </a:rPr>
+              <a:t>•  RBCD como backdoor. Configura delegación basada en recursos sobre una máquina para poder impersonar administradores hacia ella.</a:t>
+            </a:r>
+          </a:p>
+          <a:p>
+            <a:pPr>
+              <a:spcAft>
+                <a:spcPts val="600"/>
+              </a:spcAft>
+            </a:pPr>
+            <a:r>
+              <a:rPr sz="1500">
+                <a:solidFill>
+                  <a:srgbClr val="22282E"/>
+                </a:solidFill>
+              </a:rPr>
+              <a:t>•  DSRM. Estudia cómo habilitar el logon de red con la cuenta DSRM del DC y por qué es persistencia sigilosa.</a:t>
+            </a:r>
+          </a:p>
+          <a:p>
+            <a:pPr>
+              <a:spcAft>
+                <a:spcPts val="600"/>
+              </a:spcAft>
+            </a:pPr>
+            <a:r>
+              <a:rPr sz="1500">
+                <a:solidFill>
+                  <a:srgbClr val="22282E"/>
+                </a:solidFill>
+              </a:rPr>
+              <a:t>•  Detección. Audita cambios de ACL (evento 5136), la cuenta AdminSDHolder y objetos con delegación inusual.</a:t>
             </a:r>
           </a:p>
         </p:txBody>
